--- a/public/fun/pack/pptx/talkpro/발표템플릿프리미엄_27_교육·강의_코퍼차콜.pptx
+++ b/public/fun/pack/pptx/talkpro/발표템플릿프리미엄_27_교육·강의_코퍼차콜.pptx
@@ -115,12 +115,12 @@
   <p:extLst>
     <p:ext uri="{521415D9-36F7-43E2-AB2F-B90AF26B5E84}">
       <p14:sectionLst xmlns:p14="http://schemas.microsoft.com/office/powerpoint/2010/main">
-        <p14:section name="시작" id="{57B243B1-7336-4319-B40E-718806900430}">
+        <p14:section name="시작" id="{51F60BBE-51E7-4BAF-BB53-94D90D8C39E1}">
           <p14:sldIdLst>
             <p14:sldId id="256"/>
           </p14:sldIdLst>
         </p14:section>
-        <p14:section name="본문" id="{142F56BF-5A88-40B6-A358-94FDD4EE0A8C}">
+        <p14:section name="본문" id="{D13610CA-3024-40AE-8026-DD1CE32F989A}">
           <p14:sldIdLst>
             <p14:sldId id="257"/>
             <p14:sldId id="258"/>
@@ -131,7 +131,7 @@
             <p14:sldId id="263"/>
           </p14:sldIdLst>
         </p14:section>
-        <p14:section name="마무리" id="{7EACFE14-E74F-48B9-BCC8-064A261139CC}">
+        <p14:section name="마무리" id="{9BD52FBF-C4AE-44AE-BC38-D4C7382D0BD5}">
           <p14:sldIdLst>
             <p14:sldId id="264"/>
           </p14:sldIdLst>
@@ -1923,7 +1923,7 @@
             </a:lvl1pPr>
           </a:lstStyle>
           <a:p>
-            <a:fld id="{A06D0C65-D011-47ED-8A6B-94D2003ED55C}" type="slidenum">
+            <a:fld id="{DDF40B90-FEA3-42DF-ABF3-A222FFBB0EAF}" type="slidenum">
               <a:rPr lang="en-US"/>
               <a:t>‹#›</a:t>
             </a:fld>
@@ -2571,7 +2571,7 @@
             </a:lvl1pPr>
           </a:lstStyle>
           <a:p>
-            <a:fld id="{0637FD17-BA95-468D-924F-16C4BE6050C7}" type="slidenum">
+            <a:fld id="{4B58DA6C-F3FC-4FEE-888E-39550B5BB93D}" type="slidenum">
               <a:rPr lang="en-US"/>
               <a:t>‹#›</a:t>
             </a:fld>
@@ -3200,7 +3200,7 @@
             </a:lvl1pPr>
           </a:lstStyle>
           <a:p>
-            <a:fld id="{F8126B80-9D4F-44DC-9178-F2DECF92169A}" type="slidenum">
+            <a:fld id="{7C6879A3-671A-442C-9C5E-DA5C142D0C07}" type="slidenum">
               <a:rPr lang="en-US"/>
               <a:t>‹#›</a:t>
             </a:fld>
@@ -4059,7 +4059,7 @@
           <a:p>
             <a:r>
               <a:rPr lang="ko-KR"/>
-              <a:t>0000. 00. 00</a:t>
+              <a:t>날짜 입력</a:t>
             </a:r>
           </a:p>
         </p:txBody>
@@ -4144,7 +4144,7 @@
           <a:bodyPr/>
           <a:lstStyle/>
           <a:p>
-            <a:fld id="{149B5C1B-92D8-424C-8977-A009256B7E70}" type="slidenum">
+            <a:fld id="{95BE9388-BB25-465E-9F39-81F88EDCAFDB}" type="slidenum">
               <a:rPr lang="en-US"/>
               <a:t>‹#›</a:t>
             </a:fld>
@@ -5310,7 +5310,7 @@
           <a:bodyPr/>
           <a:lstStyle/>
           <a:p>
-            <a:fld id="{9BC713B3-052C-40AB-8B4A-500994CA8017}" type="slidenum">
+            <a:fld id="{1372109D-77EA-49CF-8334-24A8E5A79B15}" type="slidenum">
               <a:rPr lang="en-US"/>
               <a:t>‹#›</a:t>
             </a:fld>
@@ -5398,7 +5398,7 @@
           <a:bodyPr/>
           <a:lstStyle/>
           <a:p>
-            <a:fld id="{F207D426-CAD7-4B7F-9F6A-F7FE5781872C}" type="slidenum">
+            <a:fld id="{F277C66D-7F5E-40CB-811D-34E7252DB062}" type="slidenum">
               <a:rPr lang="en-US"/>
               <a:t>‹#›</a:t>
             </a:fld>
@@ -6344,7 +6344,7 @@
           <a:bodyPr/>
           <a:lstStyle/>
           <a:p>
-            <a:fld id="{908ACC4B-28F3-4737-BB98-AB5EEE4D2560}" type="slidenum">
+            <a:fld id="{0B071735-0BBF-4BFF-A456-4DCCC305F932}" type="slidenum">
               <a:rPr lang="en-US"/>
               <a:t>‹#›</a:t>
             </a:fld>
@@ -6942,7 +6942,7 @@
           <a:bodyPr/>
           <a:lstStyle/>
           <a:p>
-            <a:fld id="{F8FBDA20-F30E-4176-BA82-E27D248F4DB2}" type="slidenum">
+            <a:fld id="{D8D83625-7800-4D97-9881-42A2A69C4B06}" type="slidenum">
               <a:rPr lang="en-US"/>
               <a:t>‹#›</a:t>
             </a:fld>
@@ -7122,7 +7122,7 @@
           <a:bodyPr/>
           <a:lstStyle/>
           <a:p>
-            <a:fld id="{1FC9DEC3-E9ED-46E9-A92C-C53C6C6016A9}" type="slidenum">
+            <a:fld id="{57AB9830-E33B-4DC0-B126-EC959608C4C9}" type="slidenum">
               <a:rPr lang="en-US"/>
               <a:t>‹#›</a:t>
             </a:fld>
@@ -8186,7 +8186,7 @@
           <a:bodyPr/>
           <a:lstStyle/>
           <a:p>
-            <a:fld id="{3FCD6834-5DCB-4378-ADA0-55BB22F1E5C8}" type="slidenum">
+            <a:fld id="{4E7A76A2-F9D5-47CB-961F-B90C2EC5C39C}" type="slidenum">
               <a:rPr lang="en-US"/>
               <a:t>‹#›</a:t>
             </a:fld>
